--- a/ML.pptx
+++ b/ML.pptx
@@ -7667,7 +7667,7 @@
                 <a:ea typeface="Calibri" pitchFamily="34" charset="-122"/>
                 <a:cs typeface="Calibri" pitchFamily="34" charset="-120"/>
               </a:rPr>
-              <a:t>X.ON DEVICE · 7-CHANNEL REDUCTION</a:t>
+              <a:t>X.ON DEVICE · 60 TO 7-CHANNEL REDUCTION</a:t>
             </a:r>
             <a:endParaRPr lang="en-US" sz="1200" dirty="0"/>
           </a:p>
@@ -7706,7 +7706,7 @@
                 <a:ea typeface="Cambria" pitchFamily="34" charset="-122"/>
                 <a:cs typeface="Cambria" pitchFamily="34" charset="-120"/>
               </a:rPr>
-              <a:t>7 electrodes: deployable without losing fidelity</a:t>
+              <a:t>7 electrodes: a deployable montage without losing fidelity</a:t>
             </a:r>
             <a:endParaRPr lang="en-US" sz="3000" dirty="0"/>
           </a:p>
